--- a/catalog/editorial/templates/ed_cover_band_2.pptx
+++ b/catalog/editorial/templates/ed_cover_band_2.pptx
@@ -3577,7 +3577,7 @@
           <a:noFill/>
         </p:spPr>
         <p:txBody>
-          <a:bodyPr wrap="square" lIns="18288" rIns="18288" tIns="13716" bIns="13716">
+          <a:bodyPr wrap="square" anchor="t" lIns="18288" rIns="18288" tIns="13716" bIns="13716">
             <a:noAutofit/>
           </a:bodyPr>
           <a:lstStyle/>
@@ -3632,7 +3632,7 @@
           <a:noFill/>
         </p:spPr>
         <p:txBody>
-          <a:bodyPr wrap="square" lIns="18288" rIns="18288" tIns="13716" bIns="13716">
+          <a:bodyPr wrap="square" anchor="t" lIns="18288" rIns="18288" tIns="13716" bIns="13716">
             <a:noAutofit/>
           </a:bodyPr>
           <a:lstStyle/>
@@ -3687,7 +3687,7 @@
           <a:noFill/>
         </p:spPr>
         <p:txBody>
-          <a:bodyPr wrap="square" lIns="18288" rIns="18288" tIns="13716" bIns="13716">
+          <a:bodyPr wrap="square" anchor="t" lIns="18288" rIns="18288" tIns="13716" bIns="13716">
             <a:noAutofit/>
           </a:bodyPr>
           <a:lstStyle/>
@@ -3830,7 +3830,7 @@
           <a:noFill/>
         </p:spPr>
         <p:txBody>
-          <a:bodyPr wrap="square" lIns="18288" rIns="18288" tIns="13716" bIns="13716">
+          <a:bodyPr wrap="square" anchor="t" lIns="18288" rIns="18288" tIns="13716" bIns="13716">
             <a:noAutofit/>
           </a:bodyPr>
           <a:lstStyle/>
@@ -3885,7 +3885,7 @@
           <a:noFill/>
         </p:spPr>
         <p:txBody>
-          <a:bodyPr wrap="square" lIns="18288" rIns="18288" tIns="13716" bIns="13716">
+          <a:bodyPr wrap="square" anchor="t" lIns="18288" rIns="18288" tIns="13716" bIns="13716">
             <a:noAutofit/>
           </a:bodyPr>
           <a:lstStyle/>
@@ -3975,8 +3975,8 @@
         </p:nvSpPr>
         <p:spPr>
           <a:xfrm>
-            <a:off x="731520" y="3703320"/>
-            <a:ext cx="2834640" cy="685800"/>
+            <a:off x="731520" y="3712464"/>
+            <a:ext cx="2834640" cy="905256"/>
           </a:xfrm>
           <a:prstGeom prst="rect">
             <a:avLst/>
@@ -3984,7 +3984,7 @@
           <a:noFill/>
         </p:spPr>
         <p:txBody>
-          <a:bodyPr wrap="square" lIns="18288" rIns="18288" tIns="13716" bIns="13716">
+          <a:bodyPr wrap="square" anchor="ctr" lIns="18288" rIns="18288" tIns="13716" bIns="13716">
             <a:noAutofit/>
           </a:bodyPr>
           <a:lstStyle/>
@@ -4030,8 +4030,8 @@
         </p:nvSpPr>
         <p:spPr>
           <a:xfrm>
-            <a:off x="3776472" y="3703320"/>
-            <a:ext cx="7562088" cy="932688"/>
+            <a:off x="3776472" y="3712464"/>
+            <a:ext cx="7562088" cy="905256"/>
           </a:xfrm>
           <a:prstGeom prst="rect">
             <a:avLst/>
@@ -4039,7 +4039,7 @@
           <a:noFill/>
         </p:spPr>
         <p:txBody>
-          <a:bodyPr wrap="square" lIns="18288" rIns="18288" tIns="13716" bIns="13716">
+          <a:bodyPr wrap="square" anchor="ctr" lIns="18288" rIns="18288" tIns="13716" bIns="13716">
             <a:noAutofit/>
           </a:bodyPr>
           <a:lstStyle/>
@@ -4129,8 +4129,8 @@
         </p:nvSpPr>
         <p:spPr>
           <a:xfrm>
-            <a:off x="731520" y="4773168"/>
-            <a:ext cx="2834640" cy="685800"/>
+            <a:off x="731520" y="4782312"/>
+            <a:ext cx="2834640" cy="905256"/>
           </a:xfrm>
           <a:prstGeom prst="rect">
             <a:avLst/>
@@ -4138,7 +4138,7 @@
           <a:noFill/>
         </p:spPr>
         <p:txBody>
-          <a:bodyPr wrap="square" lIns="18288" rIns="18288" tIns="13716" bIns="13716">
+          <a:bodyPr wrap="square" anchor="ctr" lIns="18288" rIns="18288" tIns="13716" bIns="13716">
             <a:noAutofit/>
           </a:bodyPr>
           <a:lstStyle/>
@@ -4184,8 +4184,8 @@
         </p:nvSpPr>
         <p:spPr>
           <a:xfrm>
-            <a:off x="3776472" y="4773168"/>
-            <a:ext cx="7562088" cy="932688"/>
+            <a:off x="3776472" y="4782312"/>
+            <a:ext cx="7562088" cy="905256"/>
           </a:xfrm>
           <a:prstGeom prst="rect">
             <a:avLst/>
@@ -4193,7 +4193,7 @@
           <a:noFill/>
         </p:spPr>
         <p:txBody>
-          <a:bodyPr wrap="square" lIns="18288" rIns="18288" tIns="13716" bIns="13716">
+          <a:bodyPr wrap="square" anchor="ctr" lIns="18288" rIns="18288" tIns="13716" bIns="13716">
             <a:noAutofit/>
           </a:bodyPr>
           <a:lstStyle/>
